--- a/docs/design/dist/d09-cutover.pptx
+++ b/docs/design/dist/d09-cutover.pptx
@@ -3196,7 +3196,7 @@
                 <a:ea typeface="Pretendard"/>
                 <a:cs typeface="Pretendard"/>
               </a:rPr>
-              <a:t>사람이 쓰기를 멈춘다 → kdms cutover --yes 가 6단계를 자동으로 → 사람이 앱을 PG 로 옮긴다</a:t>
+              <a:t>사람이 쓰기를 멈춘다 → kdms cutover --yes 가 6단계를 자동으로 → 점검·배포 뒤 사람이 앱을 PG 로 옮긴다</a:t>
             </a:r>
           </a:p>
         </p:txBody>
@@ -3233,7 +3233,7 @@
                 <a:ea typeface="Pretendard"/>
                 <a:cs typeface="Pretendard"/>
               </a:rPr>
-              <a:t>KDMS-D09 · v0.1 · 2026-10-09</a:t>
+              <a:t>KDMS-D09 · v0.2 · 2026-10-10</a:t>
             </a:r>
           </a:p>
         </p:txBody>
@@ -3376,7 +3376,7 @@
       </p:sp>
       <p:sp>
         <p:nvSpPr>
-          <p:cNvPr id="8" name="영역 전환 뒤 · 되돌리기"/>
+          <p:cNvPr id="8" name="영역 전환 뒤 점검 · 앱 전환 · 되돌리기"/>
           <p:cNvSpPr/>
           <p:nvPr/>
         </p:nvSpPr>
@@ -3419,14 +3419,81 @@
                 <a:ea typeface="Pretendard"/>
                 <a:cs typeface="Pretendard"/>
               </a:rPr>
-              <a:t>전환 뒤 · 되돌리기</a:t>
+              <a:t>전환 뒤 점검 · 앱 전환 · 되돌리기</a:t>
             </a:r>
           </a:p>
         </p:txBody>
       </p:sp>
+      <p:cxnSp>
+        <p:nvCxnSpPr>
+          <p:cNvPr id="9" name="선"/>
+          <p:cNvCxnSpPr/>
+          <p:nvPr/>
+        </p:nvCxnSpPr>
+        <p:spPr>
+          <a:xfrm flipV="1">
+            <a:off x="5524500" y="4724400"/>
+            <a:ext cx="0" cy="320040"/>
+          </a:xfrm>
+          <a:prstGeom prst="line">
+            <a:avLst/>
+          </a:prstGeom>
+          <a:ln w="16764">
+            <a:solidFill>
+              <a:srgbClr val="2E9E6E"/>
+            </a:solidFill>
+            <a:prstDash val="dash"/>
+          </a:ln>
+        </p:spPr>
+      </p:cxnSp>
+      <p:cxnSp>
+        <p:nvCxnSpPr>
+          <p:cNvPr id="10" name="선"/>
+          <p:cNvCxnSpPr/>
+          <p:nvPr/>
+        </p:nvCxnSpPr>
+        <p:spPr>
+          <a:xfrm>
+            <a:off x="5524500" y="4724400"/>
+            <a:ext cx="5600700" cy="0"/>
+          </a:xfrm>
+          <a:prstGeom prst="line">
+            <a:avLst/>
+          </a:prstGeom>
+          <a:ln w="16764">
+            <a:solidFill>
+              <a:srgbClr val="2E9E6E"/>
+            </a:solidFill>
+            <a:prstDash val="dash"/>
+          </a:ln>
+        </p:spPr>
+      </p:cxnSp>
+      <p:cxnSp>
+        <p:nvCxnSpPr>
+          <p:cNvPr id="11" name="선"/>
+          <p:cNvCxnSpPr/>
+          <p:nvPr/>
+        </p:nvCxnSpPr>
+        <p:spPr>
+          <a:xfrm>
+            <a:off x="11125200" y="4724400"/>
+            <a:ext cx="0" cy="365760"/>
+          </a:xfrm>
+          <a:prstGeom prst="line">
+            <a:avLst/>
+          </a:prstGeom>
+          <a:ln w="16764">
+            <a:solidFill>
+              <a:srgbClr val="2E9E6E"/>
+            </a:solidFill>
+            <a:prstDash val="dash"/>
+            <a:tailEnd type="triangle" w="med" len="med"/>
+          </a:ln>
+        </p:spPr>
+      </p:cxnSp>
       <p:sp>
         <p:nvSpPr>
-          <p:cNvPr id="9" name="블록 전환 준비"/>
+          <p:cNvPr id="12" name="블록 전환 준비"/>
           <p:cNvSpPr/>
           <p:nvPr/>
         </p:nvSpPr>
@@ -3472,7 +3539,7 @@
       </p:sp>
       <p:sp>
         <p:nvSpPr>
-          <p:cNvPr id="10" name="블록 지연 확인"/>
+          <p:cNvPr id="13" name="블록 지연 확인"/>
           <p:cNvSpPr/>
           <p:nvPr/>
         </p:nvSpPr>
@@ -3540,7 +3607,7 @@
       </p:sp>
       <p:sp>
         <p:nvSpPr>
-          <p:cNvPr id="11" name="아이콘 timer"/>
+          <p:cNvPr id="14" name="아이콘 timer"/>
           <p:cNvSpPr/>
           <p:nvPr/>
         </p:nvSpPr>
@@ -4490,7 +4557,7 @@
       </p:sp>
       <p:sp>
         <p:nvSpPr>
-          <p:cNvPr id="12" name="번호 1"/>
+          <p:cNvPr id="15" name="번호 1"/>
           <p:cNvSpPr/>
           <p:nvPr/>
         </p:nvSpPr>
@@ -4532,7 +4599,7 @@
       </p:sp>
       <p:sp>
         <p:nvSpPr>
-          <p:cNvPr id="13" name="블록 원천 앱 쓰기 중지"/>
+          <p:cNvPr id="16" name="블록 원천 앱 쓰기 중지"/>
           <p:cNvSpPr/>
           <p:nvPr/>
         </p:nvSpPr>
@@ -4600,7 +4667,7 @@
       </p:sp>
       <p:sp>
         <p:nvSpPr>
-          <p:cNvPr id="14" name="아이콘 pause_circle"/>
+          <p:cNvPr id="17" name="아이콘 pause_circle"/>
           <p:cNvSpPr/>
           <p:nvPr/>
         </p:nvSpPr>
@@ -5541,7 +5608,7 @@
       </p:sp>
       <p:sp>
         <p:nvSpPr>
-          <p:cNvPr id="15" name="번호 2"/>
+          <p:cNvPr id="18" name="번호 2"/>
           <p:cNvSpPr/>
           <p:nvPr/>
         </p:nvSpPr>
@@ -5583,7 +5650,7 @@
       </p:sp>
       <p:sp>
         <p:nvSpPr>
-          <p:cNvPr id="16" name="블록 kdms sync 중지"/>
+          <p:cNvPr id="19" name="블록 kdms sync 중지"/>
           <p:cNvSpPr/>
           <p:nvPr/>
         </p:nvSpPr>
@@ -5651,7 +5718,7 @@
       </p:sp>
       <p:sp>
         <p:nvSpPr>
-          <p:cNvPr id="17" name="아이콘 sync"/>
+          <p:cNvPr id="20" name="아이콘 sync"/>
           <p:cNvSpPr/>
           <p:nvPr/>
         </p:nvSpPr>
@@ -6326,7 +6393,7 @@
       </p:sp>
       <p:sp>
         <p:nvSpPr>
-          <p:cNvPr id="18" name="번호 3"/>
+          <p:cNvPr id="21" name="번호 3"/>
           <p:cNvSpPr/>
           <p:nvPr/>
         </p:nvSpPr>
@@ -6368,7 +6435,7 @@
       </p:sp>
       <p:sp>
         <p:nvSpPr>
-          <p:cNvPr id="19" name="연결점 A"/>
+          <p:cNvPr id="22" name="연결점 A"/>
           <p:cNvSpPr/>
           <p:nvPr/>
         </p:nvSpPr>
@@ -6412,7 +6479,7 @@
       </p:sp>
       <p:sp>
         <p:nvSpPr>
-          <p:cNvPr id="20" name="연결점 A"/>
+          <p:cNvPr id="23" name="연결점 A"/>
           <p:cNvSpPr/>
           <p:nvPr/>
         </p:nvSpPr>
@@ -6456,7 +6523,7 @@
       </p:sp>
       <p:sp>
         <p:nvSpPr>
-          <p:cNvPr id="21" name="블록 마지막 반영"/>
+          <p:cNvPr id="24" name="블록 마지막 반영"/>
           <p:cNvSpPr/>
           <p:nvPr/>
         </p:nvSpPr>
@@ -6524,7 +6591,7 @@
       </p:sp>
       <p:sp>
         <p:nvSpPr>
-          <p:cNvPr id="22" name="아이콘 published_with_changes"/>
+          <p:cNvPr id="25" name="아이콘 published_with_changes"/>
           <p:cNvSpPr/>
           <p:nvPr/>
         </p:nvSpPr>
@@ -7281,7 +7348,7 @@
       </p:sp>
       <p:sp>
         <p:nvSpPr>
-          <p:cNvPr id="23" name="번호 4"/>
+          <p:cNvPr id="26" name="번호 4"/>
           <p:cNvSpPr/>
           <p:nvPr/>
         </p:nvSpPr>
@@ -7323,7 +7390,7 @@
       </p:sp>
       <p:sp>
         <p:nvSpPr>
-          <p:cNvPr id="24" name="블록 재적재 · 인덱스"/>
+          <p:cNvPr id="27" name="블록 재적재 · 인덱스"/>
           <p:cNvSpPr/>
           <p:nvPr/>
         </p:nvSpPr>
@@ -7391,7 +7458,7 @@
       </p:sp>
       <p:sp>
         <p:nvSpPr>
-          <p:cNvPr id="25" name="아이콘 database_upload"/>
+          <p:cNvPr id="28" name="아이콘 database_upload"/>
           <p:cNvSpPr/>
           <p:nvPr/>
         </p:nvSpPr>
@@ -9669,7 +9736,7 @@
       </p:sp>
       <p:sp>
         <p:nvSpPr>
-          <p:cNvPr id="26" name="번호 5"/>
+          <p:cNvPr id="29" name="번호 5"/>
           <p:cNvSpPr/>
           <p:nvPr/>
         </p:nvSpPr>
@@ -9711,7 +9778,7 @@
       </p:sp>
       <p:sp>
         <p:nvSpPr>
-          <p:cNvPr id="27" name="판단 6. 검증 일치?"/>
+          <p:cNvPr id="30" name="판단 6. 검증 일치?"/>
           <p:cNvSpPr/>
           <p:nvPr/>
         </p:nvSpPr>
@@ -9777,7 +9844,7 @@
       </p:sp>
       <p:sp>
         <p:nvSpPr>
-          <p:cNvPr id="28" name="블록 setval · FK"/>
+          <p:cNvPr id="31" name="블록 setval · FK"/>
           <p:cNvSpPr/>
           <p:nvPr/>
         </p:nvSpPr>
@@ -9845,7 +9912,7 @@
       </p:sp>
       <p:sp>
         <p:nvSpPr>
-          <p:cNvPr id="29" name="아이콘 account_tree"/>
+          <p:cNvPr id="32" name="아이콘 account_tree"/>
           <p:cNvSpPr/>
           <p:nvPr/>
         </p:nvSpPr>
@@ -10030,7 +10097,7 @@
       </p:sp>
       <p:sp>
         <p:nvSpPr>
-          <p:cNvPr id="30" name="번호 7"/>
+          <p:cNvPr id="33" name="번호 7"/>
           <p:cNvSpPr/>
           <p:nvPr/>
         </p:nvSpPr>
@@ -10072,7 +10139,7 @@
       </p:sp>
       <p:sp>
         <p:nvSpPr>
-          <p:cNvPr id="31" name="연결점 B"/>
+          <p:cNvPr id="34" name="연결점 B"/>
           <p:cNvSpPr/>
           <p:nvPr/>
         </p:nvSpPr>
@@ -10116,7 +10183,7 @@
       </p:sp>
       <p:sp>
         <p:nvSpPr>
-          <p:cNvPr id="32" name="블록 멈춤 (종료 5)"/>
+          <p:cNvPr id="35" name="블록 멈춤 (종료 5)"/>
           <p:cNvSpPr/>
           <p:nvPr/>
         </p:nvSpPr>
@@ -10184,7 +10251,7 @@
       </p:sp>
       <p:sp>
         <p:nvSpPr>
-          <p:cNvPr id="33" name="연결점 B"/>
+          <p:cNvPr id="36" name="연결점 B"/>
           <p:cNvSpPr/>
           <p:nvPr/>
         </p:nvSpPr>
@@ -10228,14 +10295,14 @@
       </p:sp>
       <p:sp>
         <p:nvSpPr>
-          <p:cNvPr id="34" name="블록 앱을 PG 로 전환"/>
+          <p:cNvPr id="37" name="블록 전환 뒤 점검"/>
           <p:cNvSpPr/>
           <p:nvPr/>
         </p:nvSpPr>
         <p:spPr>
           <a:xfrm>
-            <a:off x="1219200" y="5090160"/>
-            <a:ext cx="1981200" cy="762000"/>
+            <a:off x="1066800" y="5090160"/>
+            <a:ext cx="1600200" cy="762000"/>
           </a:xfrm>
           <a:prstGeom prst="roundRect">
             <a:avLst>
@@ -10271,7 +10338,7 @@
                 <a:ea typeface="Pretendard"/>
                 <a:cs typeface="Pretendard"/>
               </a:rPr>
-              <a:t>앱을 PG 로 전환</a:t>
+              <a:t>전환 뒤 점검</a:t>
             </a:r>
           </a:p>
           <a:p>
@@ -10289,21 +10356,21 @@
                 <a:ea typeface="Pretendard"/>
                 <a:cs typeface="Pretendard"/>
               </a:rPr>
-              <a:t>사람 · 다운타임 끝</a:t>
+              <a:t>kdms check --probe</a:t>
             </a:r>
           </a:p>
         </p:txBody>
       </p:sp>
       <p:sp>
         <p:nvSpPr>
-          <p:cNvPr id="35" name="아이콘 swap_horiz"/>
+          <p:cNvPr id="38" name="아이콘 fact_check"/>
           <p:cNvSpPr/>
           <p:nvPr/>
         </p:nvSpPr>
         <p:spPr>
           <a:xfrm>
-            <a:off x="2082800" y="5148580"/>
-            <a:ext cx="254000" cy="203200"/>
+            <a:off x="1737360" y="5135880"/>
+            <a:ext cx="259080" cy="228600"/>
           </a:xfrm>
           <a:custGeom>
             <a:avLst/>
@@ -10312,67 +10379,405 @@
             <a:cxnLst/>
             <a:rect l="l" t="t" r="r" b="b"/>
             <a:pathLst>
-              <a:path w="254000" h="203200">
+              <a:path w="259080" h="228600">
                 <a:moveTo>
-                  <a:pt x="61278" y="203200"/>
+                  <a:pt x="19050" y="228600"/>
                 </a:moveTo>
                 <a:lnTo>
-                  <a:pt x="0" y="141922"/>
-                </a:lnTo>
-                <a:lnTo>
-                  <a:pt x="61278" y="80645"/>
-                </a:lnTo>
-                <a:lnTo>
-                  <a:pt x="74612" y="93980"/>
-                </a:lnTo>
-                <a:lnTo>
-                  <a:pt x="36195" y="132398"/>
-                </a:lnTo>
-                <a:lnTo>
-                  <a:pt x="136525" y="132398"/>
-                </a:lnTo>
-                <a:lnTo>
-                  <a:pt x="136525" y="151448"/>
-                </a:lnTo>
-                <a:lnTo>
-                  <a:pt x="36195" y="151448"/>
-                </a:lnTo>
-                <a:lnTo>
-                  <a:pt x="74612" y="189865"/>
-                </a:lnTo>
-                <a:lnTo>
-                  <a:pt x="61278" y="203200"/>
+                  <a:pt x="17793" y="228560"/>
+                </a:lnTo>
+                <a:lnTo>
+                  <a:pt x="16563" y="228441"/>
+                </a:lnTo>
+                <a:lnTo>
+                  <a:pt x="15359" y="228243"/>
+                </a:lnTo>
+                <a:lnTo>
+                  <a:pt x="14182" y="227965"/>
+                </a:lnTo>
+                <a:lnTo>
+                  <a:pt x="13031" y="227608"/>
+                </a:lnTo>
+                <a:lnTo>
+                  <a:pt x="11906" y="227171"/>
+                </a:lnTo>
+                <a:lnTo>
+                  <a:pt x="10808" y="226655"/>
+                </a:lnTo>
+                <a:lnTo>
+                  <a:pt x="9737" y="226060"/>
+                </a:lnTo>
+                <a:lnTo>
+                  <a:pt x="8692" y="225385"/>
+                </a:lnTo>
+                <a:lnTo>
+                  <a:pt x="7673" y="224631"/>
+                </a:lnTo>
+                <a:lnTo>
+                  <a:pt x="6681" y="223798"/>
+                </a:lnTo>
+                <a:lnTo>
+                  <a:pt x="5715" y="222885"/>
+                </a:lnTo>
+                <a:lnTo>
+                  <a:pt x="4802" y="221919"/>
+                </a:lnTo>
+                <a:lnTo>
+                  <a:pt x="3969" y="220927"/>
+                </a:lnTo>
+                <a:lnTo>
+                  <a:pt x="3215" y="219908"/>
+                </a:lnTo>
+                <a:lnTo>
+                  <a:pt x="2540" y="218863"/>
+                </a:lnTo>
+                <a:lnTo>
+                  <a:pt x="1945" y="217792"/>
+                </a:lnTo>
+                <a:lnTo>
+                  <a:pt x="1429" y="216694"/>
+                </a:lnTo>
+                <a:lnTo>
+                  <a:pt x="992" y="215569"/>
+                </a:lnTo>
+                <a:lnTo>
+                  <a:pt x="635" y="214418"/>
+                </a:lnTo>
+                <a:lnTo>
+                  <a:pt x="357" y="213241"/>
+                </a:lnTo>
+                <a:lnTo>
+                  <a:pt x="159" y="212037"/>
+                </a:lnTo>
+                <a:lnTo>
+                  <a:pt x="40" y="210807"/>
+                </a:lnTo>
+                <a:lnTo>
+                  <a:pt x="0" y="209550"/>
+                </a:lnTo>
+                <a:lnTo>
+                  <a:pt x="0" y="19050"/>
+                </a:lnTo>
+                <a:lnTo>
+                  <a:pt x="40" y="17793"/>
+                </a:lnTo>
+                <a:lnTo>
+                  <a:pt x="159" y="16563"/>
+                </a:lnTo>
+                <a:lnTo>
+                  <a:pt x="357" y="15359"/>
+                </a:lnTo>
+                <a:lnTo>
+                  <a:pt x="635" y="14182"/>
+                </a:lnTo>
+                <a:lnTo>
+                  <a:pt x="992" y="13031"/>
+                </a:lnTo>
+                <a:lnTo>
+                  <a:pt x="1429" y="11906"/>
+                </a:lnTo>
+                <a:lnTo>
+                  <a:pt x="1945" y="10808"/>
+                </a:lnTo>
+                <a:lnTo>
+                  <a:pt x="2540" y="9737"/>
+                </a:lnTo>
+                <a:lnTo>
+                  <a:pt x="3215" y="8692"/>
+                </a:lnTo>
+                <a:lnTo>
+                  <a:pt x="3969" y="7673"/>
+                </a:lnTo>
+                <a:lnTo>
+                  <a:pt x="4802" y="6681"/>
+                </a:lnTo>
+                <a:lnTo>
+                  <a:pt x="5715" y="5715"/>
+                </a:lnTo>
+                <a:lnTo>
+                  <a:pt x="6681" y="4802"/>
+                </a:lnTo>
+                <a:lnTo>
+                  <a:pt x="7673" y="3969"/>
+                </a:lnTo>
+                <a:lnTo>
+                  <a:pt x="8692" y="3215"/>
+                </a:lnTo>
+                <a:lnTo>
+                  <a:pt x="9737" y="2540"/>
+                </a:lnTo>
+                <a:lnTo>
+                  <a:pt x="10808" y="1945"/>
+                </a:lnTo>
+                <a:lnTo>
+                  <a:pt x="11906" y="1429"/>
+                </a:lnTo>
+                <a:lnTo>
+                  <a:pt x="13031" y="992"/>
+                </a:lnTo>
+                <a:lnTo>
+                  <a:pt x="14182" y="635"/>
+                </a:lnTo>
+                <a:lnTo>
+                  <a:pt x="15359" y="357"/>
+                </a:lnTo>
+                <a:lnTo>
+                  <a:pt x="16563" y="159"/>
+                </a:lnTo>
+                <a:lnTo>
+                  <a:pt x="17793" y="40"/>
+                </a:lnTo>
+                <a:lnTo>
+                  <a:pt x="19050" y="0"/>
+                </a:lnTo>
+                <a:lnTo>
+                  <a:pt x="240030" y="0"/>
+                </a:lnTo>
+                <a:lnTo>
+                  <a:pt x="241287" y="40"/>
+                </a:lnTo>
+                <a:lnTo>
+                  <a:pt x="242517" y="159"/>
+                </a:lnTo>
+                <a:lnTo>
+                  <a:pt x="243721" y="357"/>
+                </a:lnTo>
+                <a:lnTo>
+                  <a:pt x="244898" y="635"/>
+                </a:lnTo>
+                <a:lnTo>
+                  <a:pt x="246049" y="992"/>
+                </a:lnTo>
+                <a:lnTo>
+                  <a:pt x="247174" y="1429"/>
+                </a:lnTo>
+                <a:lnTo>
+                  <a:pt x="248272" y="1945"/>
+                </a:lnTo>
+                <a:lnTo>
+                  <a:pt x="249343" y="2540"/>
+                </a:lnTo>
+                <a:lnTo>
+                  <a:pt x="250388" y="3215"/>
+                </a:lnTo>
+                <a:lnTo>
+                  <a:pt x="251407" y="3969"/>
+                </a:lnTo>
+                <a:lnTo>
+                  <a:pt x="252399" y="4802"/>
+                </a:lnTo>
+                <a:lnTo>
+                  <a:pt x="253365" y="5715"/>
+                </a:lnTo>
+                <a:lnTo>
+                  <a:pt x="254278" y="6681"/>
+                </a:lnTo>
+                <a:lnTo>
+                  <a:pt x="255111" y="7673"/>
+                </a:lnTo>
+                <a:lnTo>
+                  <a:pt x="255865" y="8692"/>
+                </a:lnTo>
+                <a:lnTo>
+                  <a:pt x="256540" y="9737"/>
+                </a:lnTo>
+                <a:lnTo>
+                  <a:pt x="257135" y="10808"/>
+                </a:lnTo>
+                <a:lnTo>
+                  <a:pt x="257651" y="11906"/>
+                </a:lnTo>
+                <a:lnTo>
+                  <a:pt x="258088" y="13031"/>
+                </a:lnTo>
+                <a:lnTo>
+                  <a:pt x="258445" y="14182"/>
+                </a:lnTo>
+                <a:lnTo>
+                  <a:pt x="258723" y="15359"/>
+                </a:lnTo>
+                <a:lnTo>
+                  <a:pt x="258921" y="16563"/>
+                </a:lnTo>
+                <a:lnTo>
+                  <a:pt x="259040" y="17793"/>
+                </a:lnTo>
+                <a:lnTo>
+                  <a:pt x="259080" y="19050"/>
+                </a:lnTo>
+                <a:lnTo>
+                  <a:pt x="259080" y="209550"/>
+                </a:lnTo>
+                <a:lnTo>
+                  <a:pt x="259040" y="210807"/>
+                </a:lnTo>
+                <a:lnTo>
+                  <a:pt x="258921" y="212037"/>
+                </a:lnTo>
+                <a:lnTo>
+                  <a:pt x="258723" y="213241"/>
+                </a:lnTo>
+                <a:lnTo>
+                  <a:pt x="258445" y="214418"/>
+                </a:lnTo>
+                <a:lnTo>
+                  <a:pt x="258088" y="215569"/>
+                </a:lnTo>
+                <a:lnTo>
+                  <a:pt x="257651" y="216694"/>
+                </a:lnTo>
+                <a:lnTo>
+                  <a:pt x="257135" y="217792"/>
+                </a:lnTo>
+                <a:lnTo>
+                  <a:pt x="256540" y="218863"/>
+                </a:lnTo>
+                <a:lnTo>
+                  <a:pt x="255865" y="219908"/>
+                </a:lnTo>
+                <a:lnTo>
+                  <a:pt x="255111" y="220927"/>
+                </a:lnTo>
+                <a:lnTo>
+                  <a:pt x="254278" y="221919"/>
+                </a:lnTo>
+                <a:lnTo>
+                  <a:pt x="253365" y="222885"/>
+                </a:lnTo>
+                <a:lnTo>
+                  <a:pt x="252399" y="223798"/>
+                </a:lnTo>
+                <a:lnTo>
+                  <a:pt x="251407" y="224631"/>
+                </a:lnTo>
+                <a:lnTo>
+                  <a:pt x="250388" y="225385"/>
+                </a:lnTo>
+                <a:lnTo>
+                  <a:pt x="249343" y="226060"/>
+                </a:lnTo>
+                <a:lnTo>
+                  <a:pt x="248272" y="226655"/>
+                </a:lnTo>
+                <a:lnTo>
+                  <a:pt x="247174" y="227171"/>
+                </a:lnTo>
+                <a:lnTo>
+                  <a:pt x="246049" y="227608"/>
+                </a:lnTo>
+                <a:lnTo>
+                  <a:pt x="244898" y="227965"/>
+                </a:lnTo>
+                <a:lnTo>
+                  <a:pt x="243721" y="228243"/>
+                </a:lnTo>
+                <a:lnTo>
+                  <a:pt x="242517" y="228441"/>
+                </a:lnTo>
+                <a:lnTo>
+                  <a:pt x="241287" y="228560"/>
+                </a:lnTo>
+                <a:lnTo>
+                  <a:pt x="240030" y="228600"/>
+                </a:lnTo>
+                <a:lnTo>
+                  <a:pt x="19050" y="228600"/>
                 </a:lnTo>
                 <a:close/>
                 <a:moveTo>
-                  <a:pt x="192722" y="122555"/>
+                  <a:pt x="19050" y="209550"/>
                 </a:moveTo>
                 <a:lnTo>
-                  <a:pt x="179388" y="109220"/>
-                </a:lnTo>
-                <a:lnTo>
-                  <a:pt x="217805" y="70802"/>
-                </a:lnTo>
-                <a:lnTo>
-                  <a:pt x="117475" y="70802"/>
-                </a:lnTo>
-                <a:lnTo>
-                  <a:pt x="117475" y="51752"/>
-                </a:lnTo>
-                <a:lnTo>
-                  <a:pt x="217805" y="51752"/>
-                </a:lnTo>
-                <a:lnTo>
-                  <a:pt x="179388" y="13335"/>
-                </a:lnTo>
-                <a:lnTo>
-                  <a:pt x="192722" y="0"/>
-                </a:lnTo>
-                <a:lnTo>
-                  <a:pt x="254000" y="61278"/>
-                </a:lnTo>
-                <a:lnTo>
-                  <a:pt x="192722" y="122555"/>
+                  <a:pt x="240030" y="209550"/>
+                </a:lnTo>
+                <a:lnTo>
+                  <a:pt x="240030" y="19050"/>
+                </a:lnTo>
+                <a:lnTo>
+                  <a:pt x="19050" y="19050"/>
+                </a:lnTo>
+                <a:lnTo>
+                  <a:pt x="19050" y="209550"/>
+                </a:lnTo>
+                <a:close/>
+                <a:moveTo>
+                  <a:pt x="40640" y="177800"/>
+                </a:moveTo>
+                <a:lnTo>
+                  <a:pt x="104140" y="177800"/>
+                </a:lnTo>
+                <a:lnTo>
+                  <a:pt x="104140" y="152400"/>
+                </a:lnTo>
+                <a:lnTo>
+                  <a:pt x="40640" y="152400"/>
+                </a:lnTo>
+                <a:lnTo>
+                  <a:pt x="40640" y="177800"/>
+                </a:lnTo>
+                <a:close/>
+                <a:moveTo>
+                  <a:pt x="161925" y="152400"/>
+                </a:moveTo>
+                <a:lnTo>
+                  <a:pt x="224790" y="89535"/>
+                </a:lnTo>
+                <a:lnTo>
+                  <a:pt x="206692" y="71438"/>
+                </a:lnTo>
+                <a:lnTo>
+                  <a:pt x="161925" y="116522"/>
+                </a:lnTo>
+                <a:lnTo>
+                  <a:pt x="143828" y="98425"/>
+                </a:lnTo>
+                <a:lnTo>
+                  <a:pt x="126048" y="116522"/>
+                </a:lnTo>
+                <a:lnTo>
+                  <a:pt x="161925" y="152400"/>
+                </a:lnTo>
+                <a:close/>
+                <a:moveTo>
+                  <a:pt x="40640" y="127000"/>
+                </a:moveTo>
+                <a:lnTo>
+                  <a:pt x="104140" y="127000"/>
+                </a:lnTo>
+                <a:lnTo>
+                  <a:pt x="104140" y="101600"/>
+                </a:lnTo>
+                <a:lnTo>
+                  <a:pt x="40640" y="101600"/>
+                </a:lnTo>
+                <a:lnTo>
+                  <a:pt x="40640" y="127000"/>
+                </a:lnTo>
+                <a:close/>
+                <a:moveTo>
+                  <a:pt x="40640" y="76200"/>
+                </a:moveTo>
+                <a:lnTo>
+                  <a:pt x="104140" y="76200"/>
+                </a:lnTo>
+                <a:lnTo>
+                  <a:pt x="104140" y="50800"/>
+                </a:lnTo>
+                <a:lnTo>
+                  <a:pt x="40640" y="50800"/>
+                </a:lnTo>
+                <a:lnTo>
+                  <a:pt x="40640" y="76200"/>
+                </a:lnTo>
+                <a:close/>
+                <a:moveTo>
+                  <a:pt x="19050" y="209550"/>
+                </a:moveTo>
+                <a:lnTo>
+                  <a:pt x="19050" y="19050"/>
+                </a:lnTo>
+                <a:lnTo>
+                  <a:pt x="19050" y="209550"/>
                 </a:lnTo>
                 <a:close/>
               </a:path>
@@ -10395,13 +10800,13 @@
       </p:sp>
       <p:sp>
         <p:nvSpPr>
-          <p:cNvPr id="36" name="번호 8"/>
+          <p:cNvPr id="39" name="번호 8"/>
           <p:cNvSpPr/>
           <p:nvPr/>
         </p:nvSpPr>
         <p:spPr>
           <a:xfrm>
-            <a:off x="1272540" y="5143500"/>
+            <a:off x="1120140" y="5143500"/>
             <a:ext cx="213360" cy="213360"/>
           </a:xfrm>
           <a:prstGeom prst="ellipse">
@@ -10437,14 +10842,938 @@
       </p:sp>
       <p:sp>
         <p:nvSpPr>
-          <p:cNvPr id="37" name="블록 전환 끝 (DONE)"/>
+          <p:cNvPr id="40" name="블록 트리거·권한 배포"/>
           <p:cNvSpPr/>
           <p:nvPr/>
         </p:nvSpPr>
         <p:spPr>
           <a:xfrm>
-            <a:off x="3581400" y="5303520"/>
-            <a:ext cx="1295400" cy="335280"/>
+            <a:off x="2933700" y="5090160"/>
+            <a:ext cx="1600200" cy="762000"/>
+          </a:xfrm>
+          <a:prstGeom prst="roundRect">
+            <a:avLst>
+              <a:gd name="adj" fmla="val 12000"/>
+            </a:avLst>
+          </a:prstGeom>
+          <a:solidFill>
+            <a:srgbClr val="FFFFFF"/>
+          </a:solidFill>
+          <a:ln w="13716">
+            <a:solidFill>
+              <a:srgbClr val="9DD3B8"/>
+            </a:solidFill>
+          </a:ln>
+        </p:spPr>
+        <p:txBody>
+          <a:bodyPr rtlCol="0" anchor="t" lIns="45720" tIns="358140" rIns="45720" bIns="0" wrap="none">
+            <a:noAutofit/>
+          </a:bodyPr>
+          <a:lstStyle/>
+          <a:p>
+            <a:pPr algn="ctr">
+              <a:lnSpc>
+                <a:spcPts val="1560"/>
+              </a:lnSpc>
+            </a:pPr>
+            <a:r>
+              <a:rPr sz="1200" b="1">
+                <a:solidFill>
+                  <a:srgbClr val="0B3D2E"/>
+                </a:solidFill>
+                <a:latin typeface="Pretendard"/>
+                <a:ea typeface="Pretendard"/>
+                <a:cs typeface="Pretendard"/>
+              </a:rPr>
+              <a:t>트리거·권한 배포</a:t>
+            </a:r>
+          </a:p>
+          <a:p>
+            <a:pPr algn="ctr">
+              <a:lnSpc>
+                <a:spcPts val="1320"/>
+              </a:lnSpc>
+            </a:pPr>
+            <a:r>
+              <a:rPr sz="1019" b="0">
+                <a:solidFill>
+                  <a:srgbClr val="3F4E61"/>
+                </a:solidFill>
+                <a:latin typeface="Pretendard"/>
+                <a:ea typeface="Pretendard"/>
+                <a:cs typeface="Pretendard"/>
+              </a:rPr>
+              <a:t>DBA · PG 판 객체</a:t>
+            </a:r>
+          </a:p>
+        </p:txBody>
+      </p:sp>
+      <p:sp>
+        <p:nvSpPr>
+          <p:cNvPr id="41" name="아이콘 deployed_code"/>
+          <p:cNvSpPr/>
+          <p:nvPr/>
+        </p:nvSpPr>
+        <p:spPr>
+          <a:xfrm>
+            <a:off x="3619500" y="5122228"/>
+            <a:ext cx="228600" cy="255904"/>
+          </a:xfrm>
+          <a:custGeom>
+            <a:avLst/>
+            <a:gdLst/>
+            <a:ahLst/>
+            <a:cxnLst/>
+            <a:rect l="l" t="t" r="r" b="b"/>
+            <a:pathLst>
+              <a:path w="228600" h="255904">
+                <a:moveTo>
+                  <a:pt x="104775" y="231457"/>
+                </a:moveTo>
+                <a:lnTo>
+                  <a:pt x="104775" y="133350"/>
+                </a:lnTo>
+                <a:lnTo>
+                  <a:pt x="19050" y="83820"/>
+                </a:lnTo>
+                <a:lnTo>
+                  <a:pt x="19050" y="181927"/>
+                </a:lnTo>
+                <a:lnTo>
+                  <a:pt x="104775" y="231457"/>
+                </a:lnTo>
+                <a:close/>
+                <a:moveTo>
+                  <a:pt x="123825" y="231457"/>
+                </a:moveTo>
+                <a:lnTo>
+                  <a:pt x="209550" y="181927"/>
+                </a:lnTo>
+                <a:lnTo>
+                  <a:pt x="209550" y="83502"/>
+                </a:lnTo>
+                <a:lnTo>
+                  <a:pt x="123825" y="133299"/>
+                </a:lnTo>
+                <a:lnTo>
+                  <a:pt x="123825" y="231457"/>
+                </a:lnTo>
+                <a:close/>
+                <a:moveTo>
+                  <a:pt x="114300" y="117157"/>
+                </a:moveTo>
+                <a:lnTo>
+                  <a:pt x="198755" y="67944"/>
+                </a:lnTo>
+                <a:lnTo>
+                  <a:pt x="114300" y="19050"/>
+                </a:lnTo>
+                <a:lnTo>
+                  <a:pt x="29528" y="67944"/>
+                </a:lnTo>
+                <a:lnTo>
+                  <a:pt x="114300" y="117157"/>
+                </a:lnTo>
+                <a:close/>
+                <a:moveTo>
+                  <a:pt x="9525" y="198437"/>
+                </a:moveTo>
+                <a:lnTo>
+                  <a:pt x="8785" y="197979"/>
+                </a:lnTo>
+                <a:lnTo>
+                  <a:pt x="8073" y="197498"/>
+                </a:lnTo>
+                <a:lnTo>
+                  <a:pt x="7389" y="196993"/>
+                </a:lnTo>
+                <a:lnTo>
+                  <a:pt x="6734" y="196464"/>
+                </a:lnTo>
+                <a:lnTo>
+                  <a:pt x="6106" y="195912"/>
+                </a:lnTo>
+                <a:lnTo>
+                  <a:pt x="5507" y="195336"/>
+                </a:lnTo>
+                <a:lnTo>
+                  <a:pt x="4936" y="194736"/>
+                </a:lnTo>
+                <a:lnTo>
+                  <a:pt x="4393" y="194113"/>
+                </a:lnTo>
+                <a:lnTo>
+                  <a:pt x="3878" y="193467"/>
+                </a:lnTo>
+                <a:lnTo>
+                  <a:pt x="3391" y="192797"/>
+                </a:lnTo>
+                <a:lnTo>
+                  <a:pt x="2932" y="192103"/>
+                </a:lnTo>
+                <a:lnTo>
+                  <a:pt x="2502" y="191385"/>
+                </a:lnTo>
+                <a:lnTo>
+                  <a:pt x="2102" y="190651"/>
+                </a:lnTo>
+                <a:lnTo>
+                  <a:pt x="1737" y="189906"/>
+                </a:lnTo>
+                <a:lnTo>
+                  <a:pt x="1407" y="189152"/>
+                </a:lnTo>
+                <a:lnTo>
+                  <a:pt x="1112" y="188388"/>
+                </a:lnTo>
+                <a:lnTo>
+                  <a:pt x="851" y="187615"/>
+                </a:lnTo>
+                <a:lnTo>
+                  <a:pt x="625" y="186832"/>
+                </a:lnTo>
+                <a:lnTo>
+                  <a:pt x="434" y="186039"/>
+                </a:lnTo>
+                <a:lnTo>
+                  <a:pt x="278" y="185236"/>
+                </a:lnTo>
+                <a:lnTo>
+                  <a:pt x="156" y="184423"/>
+                </a:lnTo>
+                <a:lnTo>
+                  <a:pt x="69" y="183601"/>
+                </a:lnTo>
+                <a:lnTo>
+                  <a:pt x="17" y="182769"/>
+                </a:lnTo>
+                <a:lnTo>
+                  <a:pt x="0" y="181927"/>
+                </a:lnTo>
+                <a:lnTo>
+                  <a:pt x="0" y="73977"/>
+                </a:lnTo>
+                <a:lnTo>
+                  <a:pt x="17" y="73135"/>
+                </a:lnTo>
+                <a:lnTo>
+                  <a:pt x="69" y="72303"/>
+                </a:lnTo>
+                <a:lnTo>
+                  <a:pt x="156" y="71481"/>
+                </a:lnTo>
+                <a:lnTo>
+                  <a:pt x="278" y="70668"/>
+                </a:lnTo>
+                <a:lnTo>
+                  <a:pt x="434" y="69865"/>
+                </a:lnTo>
+                <a:lnTo>
+                  <a:pt x="625" y="69072"/>
+                </a:lnTo>
+                <a:lnTo>
+                  <a:pt x="851" y="68289"/>
+                </a:lnTo>
+                <a:lnTo>
+                  <a:pt x="1112" y="67516"/>
+                </a:lnTo>
+                <a:lnTo>
+                  <a:pt x="1407" y="66752"/>
+                </a:lnTo>
+                <a:lnTo>
+                  <a:pt x="1737" y="65998"/>
+                </a:lnTo>
+                <a:lnTo>
+                  <a:pt x="2102" y="65253"/>
+                </a:lnTo>
+                <a:lnTo>
+                  <a:pt x="2502" y="64519"/>
+                </a:lnTo>
+                <a:lnTo>
+                  <a:pt x="2932" y="63801"/>
+                </a:lnTo>
+                <a:lnTo>
+                  <a:pt x="3391" y="63107"/>
+                </a:lnTo>
+                <a:lnTo>
+                  <a:pt x="3878" y="62437"/>
+                </a:lnTo>
+                <a:lnTo>
+                  <a:pt x="4393" y="61791"/>
+                </a:lnTo>
+                <a:lnTo>
+                  <a:pt x="4936" y="61168"/>
+                </a:lnTo>
+                <a:lnTo>
+                  <a:pt x="5507" y="60568"/>
+                </a:lnTo>
+                <a:lnTo>
+                  <a:pt x="6106" y="59992"/>
+                </a:lnTo>
+                <a:lnTo>
+                  <a:pt x="6734" y="59440"/>
+                </a:lnTo>
+                <a:lnTo>
+                  <a:pt x="7389" y="58911"/>
+                </a:lnTo>
+                <a:lnTo>
+                  <a:pt x="8073" y="58406"/>
+                </a:lnTo>
+                <a:lnTo>
+                  <a:pt x="8785" y="57925"/>
+                </a:lnTo>
+                <a:lnTo>
+                  <a:pt x="9525" y="57467"/>
+                </a:lnTo>
+                <a:lnTo>
+                  <a:pt x="104775" y="2540"/>
+                </a:lnTo>
+                <a:lnTo>
+                  <a:pt x="105537" y="2134"/>
+                </a:lnTo>
+                <a:lnTo>
+                  <a:pt x="106305" y="1763"/>
+                </a:lnTo>
+                <a:lnTo>
+                  <a:pt x="107080" y="1428"/>
+                </a:lnTo>
+                <a:lnTo>
+                  <a:pt x="107861" y="1128"/>
+                </a:lnTo>
+                <a:lnTo>
+                  <a:pt x="108649" y="864"/>
+                </a:lnTo>
+                <a:lnTo>
+                  <a:pt x="109444" y="634"/>
+                </a:lnTo>
+                <a:lnTo>
+                  <a:pt x="110245" y="440"/>
+                </a:lnTo>
+                <a:lnTo>
+                  <a:pt x="111053" y="282"/>
+                </a:lnTo>
+                <a:lnTo>
+                  <a:pt x="111868" y="158"/>
+                </a:lnTo>
+                <a:lnTo>
+                  <a:pt x="112689" y="70"/>
+                </a:lnTo>
+                <a:lnTo>
+                  <a:pt x="113516" y="17"/>
+                </a:lnTo>
+                <a:lnTo>
+                  <a:pt x="114351" y="0"/>
+                </a:lnTo>
+                <a:lnTo>
+                  <a:pt x="115185" y="17"/>
+                </a:lnTo>
+                <a:lnTo>
+                  <a:pt x="116011" y="70"/>
+                </a:lnTo>
+                <a:lnTo>
+                  <a:pt x="116829" y="158"/>
+                </a:lnTo>
+                <a:lnTo>
+                  <a:pt x="117639" y="282"/>
+                </a:lnTo>
+                <a:lnTo>
+                  <a:pt x="118440" y="440"/>
+                </a:lnTo>
+                <a:lnTo>
+                  <a:pt x="119234" y="634"/>
+                </a:lnTo>
+                <a:lnTo>
+                  <a:pt x="120019" y="864"/>
+                </a:lnTo>
+                <a:lnTo>
+                  <a:pt x="120797" y="1128"/>
+                </a:lnTo>
+                <a:lnTo>
+                  <a:pt x="121566" y="1428"/>
+                </a:lnTo>
+                <a:lnTo>
+                  <a:pt x="122327" y="1763"/>
+                </a:lnTo>
+                <a:lnTo>
+                  <a:pt x="123080" y="2134"/>
+                </a:lnTo>
+                <a:lnTo>
+                  <a:pt x="123825" y="2540"/>
+                </a:lnTo>
+                <a:lnTo>
+                  <a:pt x="219075" y="57467"/>
+                </a:lnTo>
+                <a:lnTo>
+                  <a:pt x="219815" y="57925"/>
+                </a:lnTo>
+                <a:lnTo>
+                  <a:pt x="220527" y="58406"/>
+                </a:lnTo>
+                <a:lnTo>
+                  <a:pt x="221211" y="58911"/>
+                </a:lnTo>
+                <a:lnTo>
+                  <a:pt x="221867" y="59440"/>
+                </a:lnTo>
+                <a:lnTo>
+                  <a:pt x="222494" y="59992"/>
+                </a:lnTo>
+                <a:lnTo>
+                  <a:pt x="223094" y="60568"/>
+                </a:lnTo>
+                <a:lnTo>
+                  <a:pt x="223665" y="61168"/>
+                </a:lnTo>
+                <a:lnTo>
+                  <a:pt x="224209" y="61791"/>
+                </a:lnTo>
+                <a:lnTo>
+                  <a:pt x="224724" y="62437"/>
+                </a:lnTo>
+                <a:lnTo>
+                  <a:pt x="225211" y="63107"/>
+                </a:lnTo>
+                <a:lnTo>
+                  <a:pt x="225670" y="63801"/>
+                </a:lnTo>
+                <a:lnTo>
+                  <a:pt x="226101" y="64519"/>
+                </a:lnTo>
+                <a:lnTo>
+                  <a:pt x="226500" y="65253"/>
+                </a:lnTo>
+                <a:lnTo>
+                  <a:pt x="226865" y="65998"/>
+                </a:lnTo>
+                <a:lnTo>
+                  <a:pt x="227194" y="66752"/>
+                </a:lnTo>
+                <a:lnTo>
+                  <a:pt x="227489" y="67516"/>
+                </a:lnTo>
+                <a:lnTo>
+                  <a:pt x="227750" y="68289"/>
+                </a:lnTo>
+                <a:lnTo>
+                  <a:pt x="227975" y="69072"/>
+                </a:lnTo>
+                <a:lnTo>
+                  <a:pt x="228166" y="69865"/>
+                </a:lnTo>
+                <a:lnTo>
+                  <a:pt x="228322" y="70668"/>
+                </a:lnTo>
+                <a:lnTo>
+                  <a:pt x="228444" y="71481"/>
+                </a:lnTo>
+                <a:lnTo>
+                  <a:pt x="228531" y="72303"/>
+                </a:lnTo>
+                <a:lnTo>
+                  <a:pt x="228583" y="73135"/>
+                </a:lnTo>
+                <a:lnTo>
+                  <a:pt x="228600" y="73977"/>
+                </a:lnTo>
+                <a:lnTo>
+                  <a:pt x="228600" y="181927"/>
+                </a:lnTo>
+                <a:lnTo>
+                  <a:pt x="228583" y="182769"/>
+                </a:lnTo>
+                <a:lnTo>
+                  <a:pt x="228531" y="183601"/>
+                </a:lnTo>
+                <a:lnTo>
+                  <a:pt x="228444" y="184423"/>
+                </a:lnTo>
+                <a:lnTo>
+                  <a:pt x="228322" y="185236"/>
+                </a:lnTo>
+                <a:lnTo>
+                  <a:pt x="228166" y="186039"/>
+                </a:lnTo>
+                <a:lnTo>
+                  <a:pt x="227975" y="186832"/>
+                </a:lnTo>
+                <a:lnTo>
+                  <a:pt x="227750" y="187615"/>
+                </a:lnTo>
+                <a:lnTo>
+                  <a:pt x="227489" y="188388"/>
+                </a:lnTo>
+                <a:lnTo>
+                  <a:pt x="227194" y="189152"/>
+                </a:lnTo>
+                <a:lnTo>
+                  <a:pt x="226865" y="189906"/>
+                </a:lnTo>
+                <a:lnTo>
+                  <a:pt x="226500" y="190651"/>
+                </a:lnTo>
+                <a:lnTo>
+                  <a:pt x="226101" y="191385"/>
+                </a:lnTo>
+                <a:lnTo>
+                  <a:pt x="225670" y="192103"/>
+                </a:lnTo>
+                <a:lnTo>
+                  <a:pt x="225211" y="192797"/>
+                </a:lnTo>
+                <a:lnTo>
+                  <a:pt x="224724" y="193467"/>
+                </a:lnTo>
+                <a:lnTo>
+                  <a:pt x="224209" y="194113"/>
+                </a:lnTo>
+                <a:lnTo>
+                  <a:pt x="223665" y="194736"/>
+                </a:lnTo>
+                <a:lnTo>
+                  <a:pt x="223094" y="195336"/>
+                </a:lnTo>
+                <a:lnTo>
+                  <a:pt x="222494" y="195912"/>
+                </a:lnTo>
+                <a:lnTo>
+                  <a:pt x="221867" y="196464"/>
+                </a:lnTo>
+                <a:lnTo>
+                  <a:pt x="221211" y="196993"/>
+                </a:lnTo>
+                <a:lnTo>
+                  <a:pt x="220527" y="197498"/>
+                </a:lnTo>
+                <a:lnTo>
+                  <a:pt x="219815" y="197979"/>
+                </a:lnTo>
+                <a:lnTo>
+                  <a:pt x="219075" y="198437"/>
+                </a:lnTo>
+                <a:lnTo>
+                  <a:pt x="123825" y="253364"/>
+                </a:lnTo>
+                <a:lnTo>
+                  <a:pt x="123063" y="253770"/>
+                </a:lnTo>
+                <a:lnTo>
+                  <a:pt x="122295" y="254141"/>
+                </a:lnTo>
+                <a:lnTo>
+                  <a:pt x="121520" y="254476"/>
+                </a:lnTo>
+                <a:lnTo>
+                  <a:pt x="120739" y="254776"/>
+                </a:lnTo>
+                <a:lnTo>
+                  <a:pt x="119951" y="255040"/>
+                </a:lnTo>
+                <a:lnTo>
+                  <a:pt x="119156" y="255270"/>
+                </a:lnTo>
+                <a:lnTo>
+                  <a:pt x="118355" y="255464"/>
+                </a:lnTo>
+                <a:lnTo>
+                  <a:pt x="117547" y="255622"/>
+                </a:lnTo>
+                <a:lnTo>
+                  <a:pt x="116732" y="255746"/>
+                </a:lnTo>
+                <a:lnTo>
+                  <a:pt x="115911" y="255834"/>
+                </a:lnTo>
+                <a:lnTo>
+                  <a:pt x="115084" y="255887"/>
+                </a:lnTo>
+                <a:lnTo>
+                  <a:pt x="114249" y="255904"/>
+                </a:lnTo>
+                <a:lnTo>
+                  <a:pt x="113415" y="255887"/>
+                </a:lnTo>
+                <a:lnTo>
+                  <a:pt x="112589" y="255834"/>
+                </a:lnTo>
+                <a:lnTo>
+                  <a:pt x="111771" y="255746"/>
+                </a:lnTo>
+                <a:lnTo>
+                  <a:pt x="110961" y="255622"/>
+                </a:lnTo>
+                <a:lnTo>
+                  <a:pt x="110160" y="255464"/>
+                </a:lnTo>
+                <a:lnTo>
+                  <a:pt x="109366" y="255270"/>
+                </a:lnTo>
+                <a:lnTo>
+                  <a:pt x="108581" y="255040"/>
+                </a:lnTo>
+                <a:lnTo>
+                  <a:pt x="107803" y="254776"/>
+                </a:lnTo>
+                <a:lnTo>
+                  <a:pt x="107034" y="254476"/>
+                </a:lnTo>
+                <a:lnTo>
+                  <a:pt x="106273" y="254141"/>
+                </a:lnTo>
+                <a:lnTo>
+                  <a:pt x="105520" y="253770"/>
+                </a:lnTo>
+                <a:lnTo>
+                  <a:pt x="104775" y="253364"/>
+                </a:lnTo>
+                <a:lnTo>
+                  <a:pt x="9525" y="198437"/>
+                </a:lnTo>
+                <a:close/>
+              </a:path>
+            </a:pathLst>
+          </a:custGeom>
+          <a:solidFill>
+            <a:srgbClr val="1E6B4F"/>
+          </a:solidFill>
+          <a:ln>
+            <a:noFill/>
+          </a:ln>
+        </p:spPr>
+        <p:txBody>
+          <a:bodyPr rtlCol="0" anchor="ctr"/>
+          <a:lstStyle/>
+          <a:p>
+            <a:pPr algn="ctr"/>
+          </a:p>
+        </p:txBody>
+      </p:sp>
+      <p:sp>
+        <p:nvSpPr>
+          <p:cNvPr id="42" name="번호 9"/>
+          <p:cNvSpPr/>
+          <p:nvPr/>
+        </p:nvSpPr>
+        <p:spPr>
+          <a:xfrm>
+            <a:off x="2987040" y="5143500"/>
+            <a:ext cx="213360" cy="213360"/>
+          </a:xfrm>
+          <a:prstGeom prst="ellipse">
+            <a:avLst/>
+          </a:prstGeom>
+          <a:solidFill>
+            <a:srgbClr val="1E6B4F"/>
+          </a:solidFill>
+          <a:ln>
+            <a:noFill/>
+          </a:ln>
+        </p:spPr>
+        <p:txBody>
+          <a:bodyPr rtlCol="0" anchor="ctr" lIns="0" tIns="0" rIns="0" bIns="0" wrap="none">
+            <a:noAutofit/>
+          </a:bodyPr>
+          <a:lstStyle/>
+          <a:p>
+            <a:pPr algn="ctr"/>
+            <a:r>
+              <a:rPr sz="1019" b="1">
+                <a:solidFill>
+                  <a:srgbClr val="FFFFFF"/>
+                </a:solidFill>
+                <a:latin typeface="Pretendard"/>
+                <a:ea typeface="Pretendard"/>
+                <a:cs typeface="Pretendard"/>
+              </a:rPr>
+              <a:t>9</a:t>
+            </a:r>
+          </a:p>
+        </p:txBody>
+      </p:sp>
+      <p:sp>
+        <p:nvSpPr>
+          <p:cNvPr id="43" name="판단 10. 계속?"/>
+          <p:cNvSpPr/>
+          <p:nvPr/>
+        </p:nvSpPr>
+        <p:spPr>
+          <a:xfrm>
+            <a:off x="4762500" y="5044440"/>
+            <a:ext cx="1524000" cy="853440"/>
+          </a:xfrm>
+          <a:prstGeom prst="diamond">
+            <a:avLst/>
+          </a:prstGeom>
+          <a:solidFill>
+            <a:srgbClr val="FFFFFF"/>
+          </a:solidFill>
+          <a:ln w="13716">
+            <a:solidFill>
+              <a:srgbClr val="9DD3B8"/>
+            </a:solidFill>
+          </a:ln>
+        </p:spPr>
+        <p:txBody>
+          <a:bodyPr rtlCol="0" anchor="t" lIns="45720" tIns="213360" rIns="45720" bIns="0" wrap="none">
+            <a:noAutofit/>
+          </a:bodyPr>
+          <a:lstStyle/>
+          <a:p>
+            <a:pPr algn="ctr">
+              <a:lnSpc>
+                <a:spcPts val="1560"/>
+              </a:lnSpc>
+            </a:pPr>
+            <a:r>
+              <a:rPr sz="1200" b="1">
+                <a:solidFill>
+                  <a:srgbClr val="0B3D2E"/>
+                </a:solidFill>
+                <a:latin typeface="Pretendard"/>
+                <a:ea typeface="Pretendard"/>
+                <a:cs typeface="Pretendard"/>
+              </a:rPr>
+              <a:t>10. 계속?</a:t>
+            </a:r>
+          </a:p>
+          <a:p>
+            <a:pPr algn="ctr">
+              <a:lnSpc>
+                <a:spcPts val="1320"/>
+              </a:lnSpc>
+            </a:pPr>
+            <a:r>
+              <a:rPr sz="1019" b="0">
+                <a:solidFill>
+                  <a:srgbClr val="3F4E61"/>
+                </a:solidFill>
+                <a:latin typeface="Pretendard"/>
+                <a:ea typeface="Pretendard"/>
+                <a:cs typeface="Pretendard"/>
+              </a:rPr>
+              <a:t>판단자</a:t>
+            </a:r>
+          </a:p>
+        </p:txBody>
+      </p:sp>
+      <p:sp>
+        <p:nvSpPr>
+          <p:cNvPr id="44" name="블록 앱을 PG 로 전환"/>
+          <p:cNvSpPr/>
+          <p:nvPr/>
+        </p:nvSpPr>
+        <p:spPr>
+          <a:xfrm>
+            <a:off x="6591300" y="5090160"/>
+            <a:ext cx="1600200" cy="762000"/>
+          </a:xfrm>
+          <a:prstGeom prst="roundRect">
+            <a:avLst>
+              <a:gd name="adj" fmla="val 12000"/>
+            </a:avLst>
+          </a:prstGeom>
+          <a:solidFill>
+            <a:srgbClr val="FFFFFF"/>
+          </a:solidFill>
+          <a:ln w="13716">
+            <a:solidFill>
+              <a:srgbClr val="9DD3B8"/>
+            </a:solidFill>
+          </a:ln>
+        </p:spPr>
+        <p:txBody>
+          <a:bodyPr rtlCol="0" anchor="t" lIns="45720" tIns="358140" rIns="45720" bIns="0" wrap="none">
+            <a:noAutofit/>
+          </a:bodyPr>
+          <a:lstStyle/>
+          <a:p>
+            <a:pPr algn="ctr">
+              <a:lnSpc>
+                <a:spcPts val="1560"/>
+              </a:lnSpc>
+            </a:pPr>
+            <a:r>
+              <a:rPr sz="1200" b="1">
+                <a:solidFill>
+                  <a:srgbClr val="0B3D2E"/>
+                </a:solidFill>
+                <a:latin typeface="Pretendard"/>
+                <a:ea typeface="Pretendard"/>
+                <a:cs typeface="Pretendard"/>
+              </a:rPr>
+              <a:t>앱을 PG 로 전환</a:t>
+            </a:r>
+          </a:p>
+          <a:p>
+            <a:pPr algn="ctr">
+              <a:lnSpc>
+                <a:spcPts val="1320"/>
+              </a:lnSpc>
+            </a:pPr>
+            <a:r>
+              <a:rPr sz="1019" b="0">
+                <a:solidFill>
+                  <a:srgbClr val="3F4E61"/>
+                </a:solidFill>
+                <a:latin typeface="Pretendard"/>
+                <a:ea typeface="Pretendard"/>
+                <a:cs typeface="Pretendard"/>
+              </a:rPr>
+              <a:t>다운타임 끝</a:t>
+            </a:r>
+          </a:p>
+        </p:txBody>
+      </p:sp>
+      <p:sp>
+        <p:nvSpPr>
+          <p:cNvPr id="45" name="아이콘 swap_horiz"/>
+          <p:cNvSpPr/>
+          <p:nvPr/>
+        </p:nvSpPr>
+        <p:spPr>
+          <a:xfrm>
+            <a:off x="7264400" y="5148580"/>
+            <a:ext cx="254000" cy="203200"/>
+          </a:xfrm>
+          <a:custGeom>
+            <a:avLst/>
+            <a:gdLst/>
+            <a:ahLst/>
+            <a:cxnLst/>
+            <a:rect l="l" t="t" r="r" b="b"/>
+            <a:pathLst>
+              <a:path w="254000" h="203200">
+                <a:moveTo>
+                  <a:pt x="61278" y="203200"/>
+                </a:moveTo>
+                <a:lnTo>
+                  <a:pt x="0" y="141922"/>
+                </a:lnTo>
+                <a:lnTo>
+                  <a:pt x="61278" y="80645"/>
+                </a:lnTo>
+                <a:lnTo>
+                  <a:pt x="74612" y="93980"/>
+                </a:lnTo>
+                <a:lnTo>
+                  <a:pt x="36195" y="132398"/>
+                </a:lnTo>
+                <a:lnTo>
+                  <a:pt x="136525" y="132398"/>
+                </a:lnTo>
+                <a:lnTo>
+                  <a:pt x="136525" y="151448"/>
+                </a:lnTo>
+                <a:lnTo>
+                  <a:pt x="36195" y="151448"/>
+                </a:lnTo>
+                <a:lnTo>
+                  <a:pt x="74612" y="189865"/>
+                </a:lnTo>
+                <a:lnTo>
+                  <a:pt x="61278" y="203200"/>
+                </a:lnTo>
+                <a:close/>
+                <a:moveTo>
+                  <a:pt x="192722" y="122555"/>
+                </a:moveTo>
+                <a:lnTo>
+                  <a:pt x="179388" y="109220"/>
+                </a:lnTo>
+                <a:lnTo>
+                  <a:pt x="217805" y="70802"/>
+                </a:lnTo>
+                <a:lnTo>
+                  <a:pt x="117475" y="70802"/>
+                </a:lnTo>
+                <a:lnTo>
+                  <a:pt x="117475" y="51752"/>
+                </a:lnTo>
+                <a:lnTo>
+                  <a:pt x="217805" y="51752"/>
+                </a:lnTo>
+                <a:lnTo>
+                  <a:pt x="179388" y="13335"/>
+                </a:lnTo>
+                <a:lnTo>
+                  <a:pt x="192722" y="0"/>
+                </a:lnTo>
+                <a:lnTo>
+                  <a:pt x="254000" y="61278"/>
+                </a:lnTo>
+                <a:lnTo>
+                  <a:pt x="192722" y="122555"/>
+                </a:lnTo>
+                <a:close/>
+              </a:path>
+            </a:pathLst>
+          </a:custGeom>
+          <a:solidFill>
+            <a:srgbClr val="1E6B4F"/>
+          </a:solidFill>
+          <a:ln>
+            <a:noFill/>
+          </a:ln>
+        </p:spPr>
+        <p:txBody>
+          <a:bodyPr rtlCol="0" anchor="ctr"/>
+          <a:lstStyle/>
+          <a:p>
+            <a:pPr algn="ctr"/>
+          </a:p>
+        </p:txBody>
+      </p:sp>
+      <p:sp>
+        <p:nvSpPr>
+          <p:cNvPr id="46" name="번호 11"/>
+          <p:cNvSpPr/>
+          <p:nvPr/>
+        </p:nvSpPr>
+        <p:spPr>
+          <a:xfrm>
+            <a:off x="6644640" y="5143500"/>
+            <a:ext cx="213360" cy="213360"/>
+          </a:xfrm>
+          <a:prstGeom prst="ellipse">
+            <a:avLst/>
+          </a:prstGeom>
+          <a:solidFill>
+            <a:srgbClr val="1E6B4F"/>
+          </a:solidFill>
+          <a:ln>
+            <a:noFill/>
+          </a:ln>
+        </p:spPr>
+        <p:txBody>
+          <a:bodyPr rtlCol="0" anchor="ctr" lIns="0" tIns="0" rIns="0" bIns="0" wrap="none">
+            <a:noAutofit/>
+          </a:bodyPr>
+          <a:lstStyle/>
+          <a:p>
+            <a:pPr algn="ctr"/>
+            <a:r>
+              <a:rPr sz="1019" b="1">
+                <a:solidFill>
+                  <a:srgbClr val="FFFFFF"/>
+                </a:solidFill>
+                <a:latin typeface="Pretendard"/>
+                <a:ea typeface="Pretendard"/>
+                <a:cs typeface="Pretendard"/>
+              </a:rPr>
+              <a:t>11</a:t>
+            </a:r>
+          </a:p>
+        </p:txBody>
+      </p:sp>
+      <p:sp>
+        <p:nvSpPr>
+          <p:cNvPr id="47" name="블록 전환 끝"/>
+          <p:cNvSpPr/>
+          <p:nvPr/>
+        </p:nvSpPr>
+        <p:spPr>
+          <a:xfrm>
+            <a:off x="8420100" y="5303520"/>
+            <a:ext cx="1143000" cy="335280"/>
           </a:xfrm>
           <a:prstGeom prst="roundRect">
             <a:avLst>
@@ -10461,7 +11790,7 @@
           </a:ln>
         </p:spPr>
         <p:txBody>
-          <a:bodyPr rtlCol="0" anchor="ctr" lIns="140208" tIns="0" rIns="0" bIns="0" wrap="none">
+          <a:bodyPr rtlCol="0" anchor="ctr" lIns="328041" tIns="0" rIns="0" bIns="0" wrap="none">
             <a:noAutofit/>
           </a:bodyPr>
           <a:lstStyle/>
@@ -10476,21 +11805,21 @@
                 <a:ea typeface="Pretendard"/>
                 <a:cs typeface="Pretendard"/>
               </a:rPr>
-              <a:t>전환 끝 (DONE)</a:t>
+              <a:t>전환 끝</a:t>
             </a:r>
           </a:p>
         </p:txBody>
       </p:sp>
       <p:sp>
         <p:nvSpPr>
-          <p:cNvPr id="38" name="블록 원천으로 되돌리기"/>
+          <p:cNvPr id="48" name="블록 원천으로 되돌리기"/>
           <p:cNvSpPr/>
           <p:nvPr/>
         </p:nvSpPr>
         <p:spPr>
           <a:xfrm>
-            <a:off x="5676900" y="5090160"/>
-            <a:ext cx="1905000" cy="762000"/>
+            <a:off x="9829800" y="5090160"/>
+            <a:ext cx="1828800" cy="762000"/>
           </a:xfrm>
           <a:prstGeom prst="roundRect">
             <a:avLst>
@@ -10567,98 +11896,12 @@
           </a:p>
         </p:txBody>
       </p:sp>
-      <p:sp>
-        <p:nvSpPr>
-          <p:cNvPr id="39" name="블록 앱을 PG 로 옮긴 뒤에는"/>
-          <p:cNvSpPr/>
-          <p:nvPr/>
-        </p:nvSpPr>
-        <p:spPr>
-          <a:xfrm>
-            <a:off x="7924800" y="5090160"/>
-            <a:ext cx="3733800" cy="762000"/>
-          </a:xfrm>
-          <a:prstGeom prst="roundRect">
-            <a:avLst>
-              <a:gd name="adj" fmla="val 12000"/>
-            </a:avLst>
-          </a:prstGeom>
-          <a:solidFill>
-            <a:srgbClr val="FFFFFF"/>
-          </a:solidFill>
-          <a:ln w="13716">
-            <a:solidFill>
-              <a:srgbClr val="9DD3B8"/>
-            </a:solidFill>
-          </a:ln>
-        </p:spPr>
-        <p:txBody>
-          <a:bodyPr rtlCol="0" anchor="t" lIns="45720" tIns="83820" rIns="45720" bIns="0" wrap="none">
-            <a:noAutofit/>
-          </a:bodyPr>
-          <a:lstStyle/>
-          <a:p>
-            <a:pPr algn="ctr">
-              <a:lnSpc>
-                <a:spcPts val="1560"/>
-              </a:lnSpc>
-            </a:pPr>
-            <a:r>
-              <a:rPr sz="1200" b="1">
-                <a:solidFill>
-                  <a:srgbClr val="0B3D2E"/>
-                </a:solidFill>
-                <a:latin typeface="Pretendard"/>
-                <a:ea typeface="Pretendard"/>
-                <a:cs typeface="Pretendard"/>
-              </a:rPr>
-              <a:t>앱을 PG 로 옮긴 뒤에는</a:t>
-            </a:r>
-          </a:p>
-          <a:p>
-            <a:pPr algn="ctr">
-              <a:lnSpc>
-                <a:spcPts val="1320"/>
-              </a:lnSpc>
-            </a:pPr>
-            <a:r>
-              <a:rPr sz="1019" b="0">
-                <a:solidFill>
-                  <a:srgbClr val="3F4E61"/>
-                </a:solidFill>
-                <a:latin typeface="Pretendard"/>
-                <a:ea typeface="Pretendard"/>
-                <a:cs typeface="Pretendard"/>
-              </a:rPr>
-              <a:t>역방향 동기화 없음 (MVP 범위 밖)</a:t>
-            </a:r>
-          </a:p>
-          <a:p>
-            <a:pPr algn="ctr">
-              <a:lnSpc>
-                <a:spcPts val="1320"/>
-              </a:lnSpc>
-            </a:pPr>
-            <a:r>
-              <a:rPr sz="1019" b="0">
-                <a:solidFill>
-                  <a:srgbClr val="3F4E61"/>
-                </a:solidFill>
-                <a:latin typeface="Pretendard"/>
-                <a:ea typeface="Pretendard"/>
-                <a:cs typeface="Pretendard"/>
-              </a:rPr>
-              <a:t>되돌리면 그 뒤 PG 에 쓴 데이터는 안 옮겨진다</a:t>
-            </a:r>
-          </a:p>
-        </p:txBody>
-      </p:sp>
       <p:cxnSp>
         <p:nvCxnSpPr>
-          <p:cNvPr id="40" name="연결 start→b1"/>
+          <p:cNvPr id="49" name="연결 start→b1"/>
           <p:cNvCxnSpPr>
-            <a:stCxn id="9" idx="3"/>
-            <a:endCxn id="10" idx="1"/>
+            <a:stCxn id="12" idx="3"/>
+            <a:endCxn id="13" idx="1"/>
           </p:cNvCxnSpPr>
           <p:nvPr/>
         </p:nvCxnSpPr>
@@ -10680,10 +11923,10 @@
       </p:cxnSp>
       <p:cxnSp>
         <p:nvCxnSpPr>
-          <p:cNvPr id="41" name="연결 b1→b2"/>
+          <p:cNvPr id="50" name="연결 b1→b2"/>
           <p:cNvCxnSpPr>
-            <a:stCxn id="10" idx="3"/>
-            <a:endCxn id="13" idx="1"/>
+            <a:stCxn id="13" idx="3"/>
+            <a:endCxn id="16" idx="1"/>
           </p:cNvCxnSpPr>
           <p:nvPr/>
         </p:nvCxnSpPr>
@@ -10705,10 +11948,10 @@
       </p:cxnSp>
       <p:cxnSp>
         <p:nvCxnSpPr>
-          <p:cNvPr id="42" name="연결 b2→b3"/>
+          <p:cNvPr id="51" name="연결 b2→b3"/>
           <p:cNvCxnSpPr>
-            <a:stCxn id="13" idx="3"/>
-            <a:endCxn id="16" idx="1"/>
+            <a:stCxn id="16" idx="3"/>
+            <a:endCxn id="19" idx="1"/>
           </p:cNvCxnSpPr>
           <p:nvPr/>
         </p:nvCxnSpPr>
@@ -10730,10 +11973,10 @@
       </p:cxnSp>
       <p:cxnSp>
         <p:nvCxnSpPr>
-          <p:cNvPr id="43" name="연결 b3→a1"/>
+          <p:cNvPr id="52" name="연결 b3→a1"/>
           <p:cNvCxnSpPr>
-            <a:stCxn id="16" idx="3"/>
-            <a:endCxn id="19" idx="2"/>
+            <a:stCxn id="19" idx="3"/>
+            <a:endCxn id="22" idx="2"/>
           </p:cNvCxnSpPr>
           <p:nvPr/>
         </p:nvCxnSpPr>
@@ -10755,10 +11998,10 @@
       </p:cxnSp>
       <p:cxnSp>
         <p:nvCxnSpPr>
-          <p:cNvPr id="44" name="연결 a2→s1"/>
+          <p:cNvPr id="53" name="연결 a2→s1"/>
           <p:cNvCxnSpPr>
-            <a:stCxn id="20" idx="6"/>
-            <a:endCxn id="21" idx="1"/>
+            <a:stCxn id="23" idx="6"/>
+            <a:endCxn id="24" idx="1"/>
           </p:cNvCxnSpPr>
           <p:nvPr/>
         </p:nvCxnSpPr>
@@ -10780,10 +12023,10 @@
       </p:cxnSp>
       <p:cxnSp>
         <p:nvCxnSpPr>
-          <p:cNvPr id="45" name="연결 s1→s2"/>
+          <p:cNvPr id="54" name="연결 s1→s2"/>
           <p:cNvCxnSpPr>
-            <a:stCxn id="21" idx="3"/>
-            <a:endCxn id="24" idx="1"/>
+            <a:stCxn id="24" idx="3"/>
+            <a:endCxn id="27" idx="1"/>
           </p:cNvCxnSpPr>
           <p:nvPr/>
         </p:nvCxnSpPr>
@@ -10805,10 +12048,10 @@
       </p:cxnSp>
       <p:cxnSp>
         <p:nvCxnSpPr>
-          <p:cNvPr id="46" name="연결 s2→chk"/>
+          <p:cNvPr id="55" name="연결 s2→chk"/>
           <p:cNvCxnSpPr>
-            <a:stCxn id="24" idx="3"/>
-            <a:endCxn id="27" idx="1"/>
+            <a:stCxn id="27" idx="3"/>
+            <a:endCxn id="30" idx="1"/>
           </p:cNvCxnSpPr>
           <p:nvPr/>
         </p:nvCxnSpPr>
@@ -10830,10 +12073,10 @@
       </p:cxnSp>
       <p:cxnSp>
         <p:nvCxnSpPr>
-          <p:cNvPr id="47" name="연결 chk→s4"/>
+          <p:cNvPr id="56" name="연결 chk→s4"/>
           <p:cNvCxnSpPr>
-            <a:stCxn id="27" idx="3"/>
-            <a:endCxn id="28" idx="1"/>
+            <a:stCxn id="30" idx="3"/>
+            <a:endCxn id="31" idx="1"/>
           </p:cNvCxnSpPr>
           <p:nvPr/>
         </p:nvCxnSpPr>
@@ -10855,7 +12098,7 @@
       </p:cxnSp>
       <p:sp>
         <p:nvSpPr>
-          <p:cNvPr id="48" name="라벨 예"/>
+          <p:cNvPr id="57" name="라벨 예"/>
           <p:cNvSpPr txBox="1"/>
           <p:nvPr/>
         </p:nvSpPr>
@@ -10894,10 +12137,10 @@
       </p:sp>
       <p:cxnSp>
         <p:nvCxnSpPr>
-          <p:cNvPr id="49" name="연결 s4→b1x"/>
+          <p:cNvPr id="58" name="연결 s4→b1x"/>
           <p:cNvCxnSpPr>
-            <a:stCxn id="28" idx="3"/>
-            <a:endCxn id="31" idx="2"/>
+            <a:stCxn id="31" idx="3"/>
+            <a:endCxn id="34" idx="2"/>
           </p:cNvCxnSpPr>
           <p:nvPr/>
         </p:nvCxnSpPr>
@@ -10919,10 +12162,10 @@
       </p:cxnSp>
       <p:cxnSp>
         <p:nvCxnSpPr>
-          <p:cNvPr id="50" name="연결 chk→stop"/>
+          <p:cNvPr id="59" name="연결 chk→stop"/>
           <p:cNvCxnSpPr>
-            <a:stCxn id="27" idx="2"/>
-            <a:endCxn id="32" idx="0"/>
+            <a:stCxn id="30" idx="2"/>
+            <a:endCxn id="35" idx="0"/>
           </p:cNvCxnSpPr>
           <p:nvPr/>
         </p:nvCxnSpPr>
@@ -10945,7 +12188,7 @@
       </p:cxnSp>
       <p:sp>
         <p:nvSpPr>
-          <p:cNvPr id="51" name="라벨 아니오"/>
+          <p:cNvPr id="60" name="라벨 아니오"/>
           <p:cNvSpPr txBox="1"/>
           <p:nvPr/>
         </p:nvSpPr>
@@ -10984,10 +12227,10 @@
       </p:sp>
       <p:cxnSp>
         <p:nvCxnSpPr>
-          <p:cNvPr id="52" name="연결 stop→s1"/>
+          <p:cNvPr id="61" name="연결 stop→s1"/>
           <p:cNvCxnSpPr>
-            <a:stCxn id="32" idx="1"/>
-            <a:endCxn id="21" idx="2"/>
+            <a:stCxn id="35" idx="1"/>
+            <a:endCxn id="24" idx="2"/>
           </p:cNvCxnSpPr>
           <p:nvPr/>
         </p:nvCxnSpPr>
@@ -11010,7 +12253,7 @@
       </p:cxnSp>
       <p:sp>
         <p:nvSpPr>
-          <p:cNvPr id="53" name="라벨 고친 뒤 다시 cutover"/>
+          <p:cNvPr id="62" name="라벨 고친 뒤 다시 cutover"/>
           <p:cNvSpPr txBox="1"/>
           <p:nvPr/>
         </p:nvSpPr>
@@ -11049,17 +12292,17 @@
       </p:sp>
       <p:cxnSp>
         <p:nvCxnSpPr>
-          <p:cNvPr id="54" name="연결 b2x→s5"/>
+          <p:cNvPr id="63" name="연결 b2x→s5"/>
           <p:cNvCxnSpPr>
-            <a:stCxn id="33" idx="6"/>
-            <a:endCxn id="34" idx="1"/>
+            <a:stCxn id="36" idx="6"/>
+            <a:endCxn id="37" idx="1"/>
           </p:cNvCxnSpPr>
           <p:nvPr/>
         </p:nvCxnSpPr>
         <p:spPr>
           <a:xfrm>
             <a:off x="899160" y="5471160"/>
-            <a:ext cx="320040" cy="0"/>
+            <a:ext cx="167640" cy="0"/>
           </a:xfrm>
           <a:prstGeom prst="line">
             <a:avLst/>
@@ -11074,17 +12317,17 @@
       </p:cxnSp>
       <p:cxnSp>
         <p:nvCxnSpPr>
-          <p:cNvPr id="55" name="연결 s5→done"/>
+          <p:cNvPr id="64" name="연결 s5→s6"/>
           <p:cNvCxnSpPr>
-            <a:stCxn id="34" idx="3"/>
-            <a:endCxn id="37" idx="1"/>
+            <a:stCxn id="37" idx="3"/>
+            <a:endCxn id="40" idx="1"/>
           </p:cNvCxnSpPr>
           <p:nvPr/>
         </p:nvCxnSpPr>
         <p:spPr>
           <a:xfrm>
-            <a:off x="3200400" y="5471160"/>
-            <a:ext cx="381000" cy="0"/>
+            <a:off x="2667000" y="5471160"/>
+            <a:ext cx="266700" cy="0"/>
           </a:xfrm>
           <a:prstGeom prst="line">
             <a:avLst/>
@@ -11099,19 +12342,132 @@
       </p:cxnSp>
       <p:cxnSp>
         <p:nvCxnSpPr>
-          <p:cNvPr id="56" name="연결 stop→back"/>
+          <p:cNvPr id="65" name="연결 s6→go"/>
           <p:cNvCxnSpPr>
-            <a:stCxn id="32" idx="2"/>
-            <a:endCxn id="38" idx="0"/>
+            <a:stCxn id="40" idx="3"/>
+            <a:endCxn id="43" idx="1"/>
           </p:cNvCxnSpPr>
           <p:nvPr/>
         </p:nvCxnSpPr>
         <p:spPr>
           <a:xfrm>
-            <a:off x="6629400" y="4587240"/>
-            <a:ext cx="0" cy="502920"/>
+            <a:off x="4533900" y="5471160"/>
+            <a:ext cx="228600" cy="0"/>
           </a:xfrm>
           <a:prstGeom prst="line">
+            <a:avLst/>
+          </a:prstGeom>
+          <a:ln w="16764">
+            <a:solidFill>
+              <a:srgbClr val="1E6B4F"/>
+            </a:solidFill>
+            <a:tailEnd type="triangle" w="med" len="med"/>
+          </a:ln>
+        </p:spPr>
+      </p:cxnSp>
+      <p:cxnSp>
+        <p:nvCxnSpPr>
+          <p:cNvPr id="66" name="연결 go→s7"/>
+          <p:cNvCxnSpPr>
+            <a:stCxn id="43" idx="3"/>
+            <a:endCxn id="44" idx="1"/>
+          </p:cNvCxnSpPr>
+          <p:nvPr/>
+        </p:nvCxnSpPr>
+        <p:spPr>
+          <a:xfrm>
+            <a:off x="6286500" y="5471160"/>
+            <a:ext cx="304800" cy="0"/>
+          </a:xfrm>
+          <a:prstGeom prst="line">
+            <a:avLst/>
+          </a:prstGeom>
+          <a:ln w="16764">
+            <a:solidFill>
+              <a:srgbClr val="1E6B4F"/>
+            </a:solidFill>
+            <a:tailEnd type="triangle" w="med" len="med"/>
+          </a:ln>
+        </p:spPr>
+      </p:cxnSp>
+      <p:sp>
+        <p:nvSpPr>
+          <p:cNvPr id="67" name="라벨 예"/>
+          <p:cNvSpPr txBox="1"/>
+          <p:nvPr/>
+        </p:nvSpPr>
+        <p:spPr>
+          <a:xfrm>
+            <a:off x="6328410" y="5250180"/>
+            <a:ext cx="220980" cy="190500"/>
+          </a:xfrm>
+          <a:prstGeom prst="rect">
+            <a:avLst/>
+          </a:prstGeom>
+          <a:solidFill>
+            <a:srgbClr val="FFFFFF"/>
+          </a:solidFill>
+        </p:spPr>
+        <p:txBody>
+          <a:bodyPr wrap="square" lIns="0" tIns="0" rIns="0" bIns="0" anchor="ctr">
+            <a:noAutofit/>
+          </a:bodyPr>
+          <a:lstStyle/>
+          <a:p>
+            <a:pPr algn="ctr"/>
+            <a:r>
+              <a:rPr sz="1019" b="1">
+                <a:solidFill>
+                  <a:srgbClr val="1E6B4F"/>
+                </a:solidFill>
+                <a:latin typeface="Pretendard"/>
+                <a:ea typeface="Pretendard"/>
+                <a:cs typeface="Pretendard"/>
+              </a:rPr>
+              <a:t>예</a:t>
+            </a:r>
+          </a:p>
+        </p:txBody>
+      </p:sp>
+      <p:cxnSp>
+        <p:nvCxnSpPr>
+          <p:cNvPr id="68" name="연결 s7→done"/>
+          <p:cNvCxnSpPr>
+            <a:stCxn id="44" idx="3"/>
+            <a:endCxn id="47" idx="1"/>
+          </p:cNvCxnSpPr>
+          <p:nvPr/>
+        </p:nvCxnSpPr>
+        <p:spPr>
+          <a:xfrm>
+            <a:off x="8191500" y="5471160"/>
+            <a:ext cx="228600" cy="0"/>
+          </a:xfrm>
+          <a:prstGeom prst="line">
+            <a:avLst/>
+          </a:prstGeom>
+          <a:ln w="16764">
+            <a:solidFill>
+              <a:srgbClr val="1E6B4F"/>
+            </a:solidFill>
+            <a:tailEnd type="triangle" w="med" len="med"/>
+          </a:ln>
+        </p:spPr>
+      </p:cxnSp>
+      <p:cxnSp>
+        <p:nvCxnSpPr>
+          <p:cNvPr id="69" name="연결 stop→back"/>
+          <p:cNvCxnSpPr>
+            <a:stCxn id="35" idx="3"/>
+          </p:cNvCxnSpPr>
+          <p:nvPr/>
+        </p:nvCxnSpPr>
+        <p:spPr>
+          <a:xfrm>
+            <a:off x="7581900" y="4351020"/>
+            <a:ext cx="2781300" cy="739140"/>
+          </a:xfrm>
+          <a:prstGeom prst="bentConnector3">
             <a:avLst/>
           </a:prstGeom>
           <a:ln w="16764">
@@ -11125,13 +12481,13 @@
       </p:cxnSp>
       <p:sp>
         <p:nvSpPr>
-          <p:cNvPr id="57" name="라벨 못 고치면"/>
+          <p:cNvPr id="70" name="라벨 못 고치면"/>
           <p:cNvSpPr txBox="1"/>
           <p:nvPr/>
         </p:nvSpPr>
         <p:spPr>
           <a:xfrm>
-            <a:off x="6675120" y="4743450"/>
+            <a:off x="8632126" y="4130040"/>
             <a:ext cx="680847" cy="190500"/>
           </a:xfrm>
           <a:prstGeom prst="rect">
@@ -11164,7 +12520,44 @@
       </p:sp>
       <p:sp>
         <p:nvSpPr>
-          <p:cNvPr id="58" name="범례"/>
+          <p:cNvPr id="71" name="글"/>
+          <p:cNvSpPr txBox="1"/>
+          <p:nvPr/>
+        </p:nvSpPr>
+        <p:spPr>
+          <a:xfrm>
+            <a:off x="5600700" y="4808220"/>
+            <a:ext cx="571500" cy="190500"/>
+          </a:xfrm>
+          <a:prstGeom prst="rect">
+            <a:avLst/>
+          </a:prstGeom>
+          <a:noFill/>
+        </p:spPr>
+        <p:txBody>
+          <a:bodyPr wrap="square" lIns="0" tIns="0" rIns="0" bIns="0" anchor="ctr">
+            <a:noAutofit/>
+          </a:bodyPr>
+          <a:lstStyle/>
+          <a:p>
+            <a:pPr algn="l"/>
+            <a:r>
+              <a:rPr sz="1019" b="1">
+                <a:solidFill>
+                  <a:srgbClr val="2E9E6E"/>
+                </a:solidFill>
+                <a:latin typeface="Pretendard"/>
+                <a:ea typeface="Pretendard"/>
+                <a:cs typeface="Pretendard"/>
+              </a:rPr>
+              <a:t>아니오</a:t>
+            </a:r>
+          </a:p>
+        </p:txBody>
+      </p:sp>
+      <p:sp>
+        <p:nvSpPr>
+          <p:cNvPr id="72" name="범례"/>
           <p:cNvSpPr/>
           <p:nvPr/>
         </p:nvSpPr>
@@ -11197,7 +12590,7 @@
       </p:sp>
       <p:sp>
         <p:nvSpPr>
-          <p:cNvPr id="59" name="범례 제목"/>
+          <p:cNvPr id="73" name="범례 제목"/>
           <p:cNvSpPr txBox="1"/>
           <p:nvPr/>
         </p:nvSpPr>
@@ -11234,7 +12627,7 @@
       </p:sp>
       <p:cxnSp>
         <p:nvCxnSpPr>
-          <p:cNvPr id="60" name="범례 처리 순서"/>
+          <p:cNvPr id="74" name="범례 처리 순서"/>
           <p:cNvCxnSpPr/>
           <p:nvPr/>
         </p:nvCxnSpPr>
@@ -11256,7 +12649,7 @@
       </p:cxnSp>
       <p:sp>
         <p:nvSpPr>
-          <p:cNvPr id="61" name="범례 글 처리 순서"/>
+          <p:cNvPr id="75" name="범례 글 처리 순서"/>
           <p:cNvSpPr txBox="1"/>
           <p:nvPr/>
         </p:nvSpPr>
@@ -11293,7 +12686,7 @@
       </p:sp>
       <p:cxnSp>
         <p:nvCxnSpPr>
-          <p:cNvPr id="62" name="범례 불합격 시 되돌아가는 경로"/>
+          <p:cNvPr id="76" name="범례 불합격 시 되돌아가는 경로"/>
           <p:cNvCxnSpPr/>
           <p:nvPr/>
         </p:nvCxnSpPr>
@@ -11316,7 +12709,7 @@
       </p:cxnSp>
       <p:sp>
         <p:nvSpPr>
-          <p:cNvPr id="63" name="범례 글 불합격 시 되돌아가는 경로"/>
+          <p:cNvPr id="77" name="범례 글 불합격 시 되돌아가는 경로"/>
           <p:cNvSpPr txBox="1"/>
           <p:nvPr/>
         </p:nvSpPr>
@@ -11353,14 +12746,14 @@
       </p:sp>
       <p:sp>
         <p:nvSpPr>
-          <p:cNvPr id="64" name="설명"/>
+          <p:cNvPr id="78" name="설명"/>
           <p:cNvSpPr txBox="1"/>
           <p:nvPr/>
         </p:nvSpPr>
         <p:spPr>
           <a:xfrm>
-            <a:off x="5152263" y="6347460"/>
-            <a:ext cx="6658737" cy="190500"/>
+            <a:off x="5081016" y="6347460"/>
+            <a:ext cx="6729984" cy="190500"/>
           </a:xfrm>
           <a:prstGeom prst="rect">
             <a:avLst/>
@@ -11383,21 +12776,21 @@
                 <a:ea typeface="Pretendard"/>
                 <a:cs typeface="Pretendard"/>
               </a:rPr>
-              <a:t>4 가 --max-wait(기본 600초) 안에 안 끝나면 종료 6 · 다운타임 = 2 ~ 8, kdms 가 재는 것은 4 ~ 7</a:t>
+              <a:t>4 가 --max-wait(기본 600초) 안에 안 끝나면 종료 6 · 다운타임 = 2 ~ 11, kdms 가 재는 것은 4 ~ 7</a:t>
             </a:r>
           </a:p>
         </p:txBody>
       </p:sp>
       <p:sp>
         <p:nvSpPr>
-          <p:cNvPr id="65" name="설명"/>
+          <p:cNvPr id="79" name="설명"/>
           <p:cNvSpPr txBox="1"/>
           <p:nvPr/>
         </p:nvSpPr>
         <p:spPr>
           <a:xfrm>
-            <a:off x="6648450" y="6537960"/>
-            <a:ext cx="5162550" cy="190500"/>
+            <a:off x="5592699" y="6537960"/>
+            <a:ext cx="6218301" cy="190500"/>
           </a:xfrm>
           <a:prstGeom prst="rect">
             <a:avLst/>
@@ -11420,7 +12813,7 @@
                 <a:ea typeface="Pretendard"/>
                 <a:cs typeface="Pretendard"/>
               </a:rPr>
-              <a:t>원천은 읽기만 했으므로 8 전까지는 원천으로 돌아가도 원천 데이터는 그대로다</a:t>
+              <a:t>11 전까지는 원천으로 돌아가도 원천 데이터는 그대로 · 11 뒤에는 역방향 동기화 없음(MVP 밖)</a:t>
             </a:r>
           </a:p>
         </p:txBody>
